--- a/需求/一口清/一口清需求模板-0710.pptx
+++ b/需求/一口清/一口清需求模板-0710.pptx
@@ -2653,7 +2653,7 @@
         <a:spcBef>
           <a:spcPts val="750"/>
         </a:spcBef>
-        <a:buFont typeface="Arial" panose="020B0604020202020204" pitchFamily="34" charset="0"/>
+        <a:buFont typeface="Arial" panose="020B0604020202090204" pitchFamily="34" charset="0"/>
         <a:buChar char="•"/>
         <a:defRPr sz="2100" kern="1200">
           <a:solidFill>
@@ -2671,7 +2671,7 @@
         <a:spcBef>
           <a:spcPts val="375"/>
         </a:spcBef>
-        <a:buFont typeface="Arial" panose="020B0604020202020204" pitchFamily="34" charset="0"/>
+        <a:buFont typeface="Arial" panose="020B0604020202090204" pitchFamily="34" charset="0"/>
         <a:buChar char="•"/>
         <a:defRPr sz="1800" kern="1200">
           <a:solidFill>
@@ -2689,7 +2689,7 @@
         <a:spcBef>
           <a:spcPts val="375"/>
         </a:spcBef>
-        <a:buFont typeface="Arial" panose="020B0604020202020204" pitchFamily="34" charset="0"/>
+        <a:buFont typeface="Arial" panose="020B0604020202090204" pitchFamily="34" charset="0"/>
         <a:buChar char="•"/>
         <a:defRPr sz="1500" kern="1200">
           <a:solidFill>
@@ -2707,7 +2707,7 @@
         <a:spcBef>
           <a:spcPts val="375"/>
         </a:spcBef>
-        <a:buFont typeface="Arial" panose="020B0604020202020204" pitchFamily="34" charset="0"/>
+        <a:buFont typeface="Arial" panose="020B0604020202090204" pitchFamily="34" charset="0"/>
         <a:buChar char="•"/>
         <a:defRPr sz="1350" kern="1200">
           <a:solidFill>
@@ -2725,7 +2725,7 @@
         <a:spcBef>
           <a:spcPts val="375"/>
         </a:spcBef>
-        <a:buFont typeface="Arial" panose="020B0604020202020204" pitchFamily="34" charset="0"/>
+        <a:buFont typeface="Arial" panose="020B0604020202090204" pitchFamily="34" charset="0"/>
         <a:buChar char="•"/>
         <a:defRPr sz="1350" kern="1200">
           <a:solidFill>
@@ -2743,7 +2743,7 @@
         <a:spcBef>
           <a:spcPts val="375"/>
         </a:spcBef>
-        <a:buFont typeface="Arial" panose="020B0604020202020204" pitchFamily="34" charset="0"/>
+        <a:buFont typeface="Arial" panose="020B0604020202090204" pitchFamily="34" charset="0"/>
         <a:buChar char="•"/>
         <a:defRPr sz="1350" kern="1200">
           <a:solidFill>
@@ -2761,7 +2761,7 @@
         <a:spcBef>
           <a:spcPts val="375"/>
         </a:spcBef>
-        <a:buFont typeface="Arial" panose="020B0604020202020204" pitchFamily="34" charset="0"/>
+        <a:buFont typeface="Arial" panose="020B0604020202090204" pitchFamily="34" charset="0"/>
         <a:buChar char="•"/>
         <a:defRPr sz="1350" kern="1200">
           <a:solidFill>
@@ -2779,7 +2779,7 @@
         <a:spcBef>
           <a:spcPts val="375"/>
         </a:spcBef>
-        <a:buFont typeface="Arial" panose="020B0604020202020204" pitchFamily="34" charset="0"/>
+        <a:buFont typeface="Arial" panose="020B0604020202090204" pitchFamily="34" charset="0"/>
         <a:buChar char="•"/>
         <a:defRPr sz="1350" kern="1200">
           <a:solidFill>
@@ -2797,7 +2797,7 @@
         <a:spcBef>
           <a:spcPts val="375"/>
         </a:spcBef>
-        <a:buFont typeface="Arial" panose="020B0604020202020204" pitchFamily="34" charset="0"/>
+        <a:buFont typeface="Arial" panose="020B0604020202090204" pitchFamily="34" charset="0"/>
         <a:buChar char="•"/>
         <a:defRPr sz="1350" kern="1200">
           <a:solidFill>
@@ -9415,6 +9415,31 @@
               <a:latin typeface="微软雅黑" panose="020B0503020204020204" pitchFamily="34" charset="-122"/>
               <a:ea typeface="微软雅黑" panose="020B0503020204020204" pitchFamily="34" charset="-122"/>
             </a:endParaRPr>
+          </a:p>
+        </p:txBody>
+      </p:sp>
+      <p:sp>
+        <p:nvSpPr>
+          <p:cNvPr id="4" name="文本框 3"/>
+          <p:cNvSpPr txBox="1"/>
+          <p:nvPr/>
+        </p:nvSpPr>
+        <p:spPr>
+          <a:xfrm>
+            <a:off x="7176770" y="9004935"/>
+            <a:ext cx="2286000" cy="368300"/>
+          </a:xfrm>
+          <a:prstGeom prst="rect">
+            <a:avLst/>
+          </a:prstGeom>
+          <a:noFill/>
+        </p:spPr>
+        <p:txBody>
+          <a:bodyPr wrap="square" rtlCol="0">
+            <a:spAutoFit/>
+          </a:bodyPr>
+          <a:p>
+            <a:endParaRPr lang="zh-CN" altLang="en-US"/>
           </a:p>
         </p:txBody>
       </p:sp>
